--- a/lectures/week08-relational-databases/W08L_slides.pptx
+++ b/lectures/week08-relational-databases/W08L_slides.pptx
@@ -882,7 +882,7 @@
               <a:rPr lang="en-US" dirty="0"/>
               <a:t>Rule of thumb: web UI to explore and to find out what exists; code the moment you need it twice. A query typed into a web form cannot be re-run by a reviewer. A script in your repo can. Direct tie to Week 2: reproducibility.
 UCSC also exposes a public read-only MySQL server (genome-mysql.soe.ucsc.edu); I have not tested outbound MySQL from SPH 300A, so do not promise it in class.
-For Lab 4, none of this is required: the lab is clinical SQLite. This is context for the genomic side of your projects.</a:t>
+For Lab 4, none of this is required: the lab uses a SQLite database of real TCGA lung cancer data. This is context for the genomic side of your projects.</a:t>
             </a:r>
             <a:endParaRPr lang="en-US" dirty="0"/>
           </a:p>
